--- a/public/fun/pack/pptx/birthdaypro/돌잔치프리미엄_38_사진중심_퓨터실버.pptx
+++ b/public/fun/pack/pptx/birthdaypro/돌잔치프리미엄_38_사진중심_퓨터실버.pptx
@@ -112,12 +112,12 @@
   <p:extLst>
     <p:ext uri="{521415D9-36F7-43E2-AB2F-B90AF26B5E84}">
       <p14:sectionLst xmlns:p14="http://schemas.microsoft.com/office/powerpoint/2010/main">
-        <p14:section name="시작" id="{9CA3C0C4-7069-4FC0-ABCA-9CA52B7F3DBC}">
+        <p14:section name="시작" id="{993705C1-6332-4899-997E-2002348447A3}">
           <p14:sldIdLst>
             <p14:sldId id="256"/>
           </p14:sldIdLst>
         </p14:section>
-        <p14:section name="본문" id="{432BEAFB-24C6-4FCF-A987-6C2E170EA5D2}">
+        <p14:section name="본문" id="{9ADC09CD-9CB0-4D8D-BA00-52D5D1B27B7D}">
           <p14:sldIdLst>
             <p14:sldId id="257"/>
             <p14:sldId id="258"/>
@@ -125,7 +125,7 @@
             <p14:sldId id="260"/>
           </p14:sldIdLst>
         </p14:section>
-        <p14:section name="마무리" id="{4012A4C2-579C-4C83-9812-D5D15D6F23B1}">
+        <p14:section name="마무리" id="{373C8F7C-6E16-468D-97A2-0C0088B95A34}">
           <p14:sldIdLst>
             <p14:sldId id="261"/>
           </p14:sldIdLst>
@@ -1419,7 +1419,7 @@
             </a:lvl1pPr>
           </a:lstStyle>
           <a:p>
-            <a:fld id="{5C75BC53-3468-4D1A-8820-00B0357DE837}" type="slidenum">
+            <a:fld id="{121D4E54-5084-43AF-9181-6FF429E58DB7}" type="slidenum">
               <a:rPr lang="en-US"/>
               <a:t>‹#›</a:t>
             </a:fld>
@@ -2112,7 +2112,7 @@
             </a:lvl1pPr>
           </a:lstStyle>
           <a:p>
-            <a:fld id="{946D29E5-F17F-4ACB-A7AC-711BA3B263EF}" type="slidenum">
+            <a:fld id="{CD822D8F-E2A4-47F7-A501-3E14E85CA855}" type="slidenum">
               <a:rPr lang="en-US"/>
               <a:t>‹#›</a:t>
             </a:fld>
@@ -2861,7 +2861,7 @@
             </a:lvl1pPr>
           </a:lstStyle>
           <a:p>
-            <a:fld id="{CAC9F6BF-C28F-4D14-B924-5D6D0A518BB1}" type="slidenum">
+            <a:fld id="{F1E9F5A3-1921-4AC0-993B-9CEDE0698D79}" type="slidenum">
               <a:rPr lang="en-US"/>
               <a:t>‹#›</a:t>
             </a:fld>
@@ -3746,7 +3746,7 @@
           <a:p>
             <a:r>
               <a:rPr lang="ko-KR"/>
-              <a:t>아기 이름 · 0000. 00. 00</a:t>
+              <a:t>아기 이름 · 날짜 입력</a:t>
             </a:r>
           </a:p>
           <a:p>
@@ -3929,7 +3929,7 @@
           <a:bodyPr/>
           <a:lstStyle/>
           <a:p>
-            <a:fld id="{355C8D18-E528-41F8-A153-B05B735F6A33}" type="slidenum">
+            <a:fld id="{F83110C6-ACA9-47D9-9461-E074A310D84B}" type="slidenum">
               <a:rPr lang="en-US"/>
               <a:t>‹#›</a:t>
             </a:fld>
@@ -4691,7 +4691,7 @@
           <a:bodyPr/>
           <a:lstStyle/>
           <a:p>
-            <a:fld id="{CF508D46-838D-4BA1-ACD1-BE9CA8E4846C}" type="slidenum">
+            <a:fld id="{37C03A8B-F7E0-4105-81B7-E9BA4D2A4FA4}" type="slidenum">
               <a:rPr lang="en-US"/>
               <a:t>‹#›</a:t>
             </a:fld>
@@ -4801,7 +4801,7 @@
           <a:bodyPr/>
           <a:lstStyle/>
           <a:p>
-            <a:fld id="{E2ACC043-323A-4AB2-B4D1-FD74C1A1364B}" type="slidenum">
+            <a:fld id="{CCC685F0-4CAD-41D2-A7B8-B322E92CD2CE}" type="slidenum">
               <a:rPr lang="en-US"/>
               <a:t>‹#›</a:t>
             </a:fld>
@@ -6258,7 +6258,7 @@
           <a:bodyPr/>
           <a:lstStyle/>
           <a:p>
-            <a:fld id="{D5ECAD26-48D3-4CC9-BB00-FDDBAE8F9C65}" type="slidenum">
+            <a:fld id="{FA9EEA5C-ADCF-400A-8FC5-6C698629D651}" type="slidenum">
               <a:rPr lang="en-US"/>
               <a:t>‹#›</a:t>
             </a:fld>
